--- a/reports/04-decision-memo.pptx
+++ b/reports/04-decision-memo.pptx
@@ -107,7 +107,7 @@
   <p:extLst>
     <p:ext uri="{521415D9-36F7-43E2-AB2F-B90AF26B5E84}">
       <p14:sectionLst xmlns:p14="http://schemas.microsoft.com/office/powerpoint/2010/main">
-        <p14:section name="Decision memo" id="{8750907c-166e-be9a-6e5e-1bd4f80de1cb}">
+        <p14:section name="Decision memo" id="{957ae5e8-5421-f73e-fe0e-6b56b75cf57e}">
           <p14:sldIdLst>
             <p14:sldId id="256"/>
           </p14:sldIdLst>
